--- a/Presentation Slides/Interim-Demo C22386123.pptx
+++ b/Presentation Slides/Interim-Demo C22386123.pptx
@@ -236,7 +236,7 @@
           <a:p>
             <a:fld id="{1ED4181D-5C98-4ACF-93E4-94920DC18D97}" type="datetimeFigureOut">
               <a:rPr lang="en-IE" smtClean="0"/>
-              <a:t>29/11/2025</a:t>
+              <a:t>02/12/2025</a:t>
             </a:fld>
             <a:endParaRPr lang="en-IE"/>
           </a:p>
@@ -415,7 +415,7 @@
             <a:fld id="{4C128B10-01B1-489D-B962-DD80D2263B82}" type="datetimeFigureOut">
               <a:rPr lang="en-IE" smtClean="0"/>
               <a:pPr/>
-              <a:t>29/11/2025</a:t>
+              <a:t>02/12/2025</a:t>
             </a:fld>
             <a:endParaRPr lang="en-IE"/>
           </a:p>
@@ -740,7 +740,20 @@
           </a:bodyPr>
           <a:lstStyle/>
           <a:p>
-            <a:endParaRPr lang="en-IE"/>
+            <a:r>
+              <a:rPr lang="en-GB" dirty="0"/>
+              <a:t>Thank you for having me today. My name is Karl Negrillo and I am presenting my project Sign and Spell VR – An immersive virtual reality application for learning Irish Sign Language.</a:t>
+            </a:r>
+          </a:p>
+          <a:p>
+            <a:endParaRPr lang="en-GB" dirty="0"/>
+          </a:p>
+          <a:p>
+            <a:r>
+              <a:rPr lang="en-GB" dirty="0"/>
+              <a:t>Let me talk about my project.</a:t>
+            </a:r>
+            <a:endParaRPr lang="en-IE" dirty="0"/>
           </a:p>
         </p:txBody>
       </p:sp>
@@ -834,7 +847,155 @@
           </a:bodyPr>
           <a:lstStyle/>
           <a:p>
-            <a:endParaRPr lang="en-IE"/>
+            <a:r>
+              <a:rPr lang="en-GB" sz="1200" b="0" i="0" kern="1200" dirty="0" err="1">
+                <a:solidFill>
+                  <a:schemeClr val="tx1"/>
+                </a:solidFill>
+                <a:effectLst/>
+                <a:latin typeface="+mn-lt"/>
+                <a:ea typeface="+mn-ea"/>
+                <a:cs typeface="+mn-cs"/>
+              </a:rPr>
+              <a:t>Im</a:t>
+            </a:r>
+            <a:r>
+              <a:rPr lang="en-GB" sz="1200" b="0" i="0" kern="1200" dirty="0">
+                <a:solidFill>
+                  <a:schemeClr val="tx1"/>
+                </a:solidFill>
+                <a:effectLst/>
+                <a:latin typeface="+mn-lt"/>
+                <a:ea typeface="+mn-ea"/>
+                <a:cs typeface="+mn-cs"/>
+              </a:rPr>
+              <a:t> not using a fancy external database yet. Instead, we're storing everything locally on the Quest headset using JSON files.</a:t>
+            </a:r>
+          </a:p>
+          <a:p>
+            <a:endParaRPr lang="en-GB" sz="1200" b="0" i="0" kern="1200" dirty="0">
+              <a:solidFill>
+                <a:schemeClr val="tx1"/>
+              </a:solidFill>
+              <a:effectLst/>
+              <a:latin typeface="+mn-lt"/>
+              <a:ea typeface="+mn-ea"/>
+              <a:cs typeface="+mn-cs"/>
+            </a:endParaRPr>
+          </a:p>
+          <a:p>
+            <a:r>
+              <a:rPr lang="en-GB" sz="1200" b="0" i="0" kern="1200" dirty="0">
+                <a:solidFill>
+                  <a:schemeClr val="tx1"/>
+                </a:solidFill>
+                <a:effectLst/>
+                <a:latin typeface="+mn-lt"/>
+                <a:ea typeface="+mn-ea"/>
+                <a:cs typeface="+mn-cs"/>
+              </a:rPr>
+              <a:t>So when someone uses the app, all their information—their calibration settings, what letters they've learned, their progress stats—gets saved in local JSON files directly on the Quest device. It's like a little database living on the headset itself.</a:t>
+            </a:r>
+          </a:p>
+          <a:p>
+            <a:endParaRPr lang="en-GB" sz="1200" b="0" i="0" kern="1200" dirty="0">
+              <a:solidFill>
+                <a:schemeClr val="tx1"/>
+              </a:solidFill>
+              <a:effectLst/>
+              <a:latin typeface="+mn-lt"/>
+              <a:ea typeface="+mn-ea"/>
+              <a:cs typeface="+mn-cs"/>
+            </a:endParaRPr>
+          </a:p>
+          <a:p>
+            <a:r>
+              <a:rPr lang="en-GB" sz="1200" b="0" i="0" kern="1200" dirty="0">
+                <a:solidFill>
+                  <a:schemeClr val="tx1"/>
+                </a:solidFill>
+                <a:effectLst/>
+                <a:latin typeface="+mn-lt"/>
+                <a:ea typeface="+mn-ea"/>
+                <a:cs typeface="+mn-cs"/>
+              </a:rPr>
+              <a:t>Each learner gets one JSON structure. Think of it like a file folder for each person that contains: their user info, their hand calibration data (remember that calibration phase?), which alphabet letters they've practiced, and some basic statistics like how many times they've tried each sign.</a:t>
+            </a:r>
+          </a:p>
+          <a:p>
+            <a:endParaRPr lang="en-GB" sz="1200" b="0" i="0" kern="1200" dirty="0">
+              <a:solidFill>
+                <a:schemeClr val="tx1"/>
+              </a:solidFill>
+              <a:effectLst/>
+              <a:latin typeface="+mn-lt"/>
+              <a:ea typeface="+mn-ea"/>
+              <a:cs typeface="+mn-cs"/>
+            </a:endParaRPr>
+          </a:p>
+          <a:p>
+            <a:r>
+              <a:rPr lang="en-GB" sz="1200" b="0" i="0" kern="1200" dirty="0">
+                <a:solidFill>
+                  <a:schemeClr val="tx1"/>
+                </a:solidFill>
+                <a:effectLst/>
+                <a:latin typeface="+mn-lt"/>
+                <a:ea typeface="+mn-ea"/>
+                <a:cs typeface="+mn-cs"/>
+              </a:rPr>
+              <a:t>Now, to actually read and write these files, we use Godot's </a:t>
+            </a:r>
+            <a:r>
+              <a:rPr lang="en-GB" sz="1200" b="0" i="0" kern="1200" dirty="0" err="1">
+                <a:solidFill>
+                  <a:schemeClr val="tx1"/>
+                </a:solidFill>
+                <a:effectLst/>
+                <a:latin typeface="+mn-lt"/>
+                <a:ea typeface="+mn-ea"/>
+                <a:cs typeface="+mn-cs"/>
+              </a:rPr>
+              <a:t>FileAccess</a:t>
+            </a:r>
+            <a:r>
+              <a:rPr lang="en-GB" sz="1200" b="0" i="0" kern="1200" dirty="0">
+                <a:solidFill>
+                  <a:schemeClr val="tx1"/>
+                </a:solidFill>
+                <a:effectLst/>
+                <a:latin typeface="+mn-lt"/>
+                <a:ea typeface="+mn-ea"/>
+                <a:cs typeface="+mn-cs"/>
+              </a:rPr>
+              <a:t> API. That's basically Godot's built-in toolbox for file operations. We point it to the user data path on the Quest, and boom—we can load their data when they start the app and save updates as they practice.</a:t>
+            </a:r>
+          </a:p>
+          <a:p>
+            <a:endParaRPr lang="en-GB" sz="1200" b="0" i="0" kern="1200" dirty="0">
+              <a:solidFill>
+                <a:schemeClr val="tx1"/>
+              </a:solidFill>
+              <a:effectLst/>
+              <a:latin typeface="+mn-lt"/>
+              <a:ea typeface="+mn-ea"/>
+              <a:cs typeface="+mn-cs"/>
+            </a:endParaRPr>
+          </a:p>
+          <a:p>
+            <a:r>
+              <a:rPr lang="en-GB" sz="1200" b="0" i="0" kern="1200" dirty="0">
+                <a:solidFill>
+                  <a:schemeClr val="tx1"/>
+                </a:solidFill>
+                <a:effectLst/>
+                <a:latin typeface="+mn-lt"/>
+                <a:ea typeface="+mn-ea"/>
+                <a:cs typeface="+mn-cs"/>
+              </a:rPr>
+              <a:t>All though its not built yet, Right now it's local, but the same JSON structure we're using can easily be sent to a cloud service later—like Firebase or a custom backend—without changing our whole data model. So if we scale up and want cross-device syncing in the future, we won't need to rebuild everything.</a:t>
+            </a:r>
+            <a:endParaRPr lang="en-IE" dirty="0"/>
           </a:p>
         </p:txBody>
       </p:sp>
@@ -856,7 +1017,7 @@
             <a:fld id="{39155FEB-D5E4-4A1E-87F4-37E283567B6E}" type="slidenum">
               <a:rPr lang="en-IE" smtClean="0"/>
               <a:pPr/>
-              <a:t>11</a:t>
+              <a:t>10</a:t>
             </a:fld>
             <a:endParaRPr lang="en-IE"/>
           </a:p>
@@ -865,7 +1026,7 @@
     </p:spTree>
     <p:extLst>
       <p:ext uri="{BB962C8B-B14F-4D97-AF65-F5344CB8AC3E}">
-        <p14:creationId xmlns:p14="http://schemas.microsoft.com/office/powerpoint/2010/main" val="1203034569"/>
+        <p14:creationId xmlns:p14="http://schemas.microsoft.com/office/powerpoint/2010/main" val="4146026319"/>
       </p:ext>
     </p:extLst>
   </p:cSld>
@@ -950,7 +1111,7 @@
             <a:fld id="{39155FEB-D5E4-4A1E-87F4-37E283567B6E}" type="slidenum">
               <a:rPr lang="en-IE" smtClean="0"/>
               <a:pPr/>
-              <a:t>12</a:t>
+              <a:t>11</a:t>
             </a:fld>
             <a:endParaRPr lang="en-IE"/>
           </a:p>
@@ -959,7 +1120,7 @@
     </p:spTree>
     <p:extLst>
       <p:ext uri="{BB962C8B-B14F-4D97-AF65-F5344CB8AC3E}">
-        <p14:creationId xmlns:p14="http://schemas.microsoft.com/office/powerpoint/2010/main" val="3488367017"/>
+        <p14:creationId xmlns:p14="http://schemas.microsoft.com/office/powerpoint/2010/main" val="1203034569"/>
       </p:ext>
     </p:extLst>
   </p:cSld>
@@ -1022,6 +1183,353 @@
           </a:bodyPr>
           <a:lstStyle/>
           <a:p>
+            <a:r>
+              <a:rPr lang="en-GB" sz="1200" b="0" i="0" kern="1200" dirty="0">
+                <a:solidFill>
+                  <a:schemeClr val="tx1"/>
+                </a:solidFill>
+                <a:effectLst/>
+                <a:latin typeface="+mn-lt"/>
+                <a:ea typeface="+mn-ea"/>
+                <a:cs typeface="+mn-cs"/>
+              </a:rPr>
+              <a:t>So, what was I evaluating with that demo?</a:t>
+            </a:r>
+          </a:p>
+          <a:p>
+            <a:endParaRPr lang="en-GB" sz="1200" b="0" i="0" kern="1200" dirty="0">
+              <a:solidFill>
+                <a:schemeClr val="tx1"/>
+              </a:solidFill>
+              <a:effectLst/>
+              <a:latin typeface="+mn-lt"/>
+              <a:ea typeface="+mn-ea"/>
+              <a:cs typeface="+mn-cs"/>
+            </a:endParaRPr>
+          </a:p>
+          <a:p>
+            <a:r>
+              <a:rPr lang="en-GB" sz="1200" b="0" i="0" kern="1200" dirty="0">
+                <a:solidFill>
+                  <a:schemeClr val="tx1"/>
+                </a:solidFill>
+                <a:effectLst/>
+                <a:latin typeface="+mn-lt"/>
+                <a:ea typeface="+mn-ea"/>
+                <a:cs typeface="+mn-cs"/>
+              </a:rPr>
+              <a:t>Criterion 1: </a:t>
+            </a:r>
+            <a:r>
+              <a:rPr lang="en-GB" sz="1200" b="0" i="1" kern="1200" dirty="0">
+                <a:solidFill>
+                  <a:schemeClr val="tx1"/>
+                </a:solidFill>
+                <a:effectLst/>
+                <a:latin typeface="+mn-lt"/>
+                <a:ea typeface="+mn-ea"/>
+                <a:cs typeface="+mn-cs"/>
+              </a:rPr>
+              <a:t>Can the system accurately recognize the letters A, V, and D from hand tracking on both hands?</a:t>
+            </a:r>
+            <a:endParaRPr lang="en-GB" sz="1200" b="0" i="0" kern="1200" dirty="0">
+              <a:solidFill>
+                <a:schemeClr val="tx1"/>
+              </a:solidFill>
+              <a:effectLst/>
+              <a:latin typeface="+mn-lt"/>
+              <a:ea typeface="+mn-ea"/>
+              <a:cs typeface="+mn-cs"/>
+            </a:endParaRPr>
+          </a:p>
+          <a:p>
+            <a:pPr marL="171450" indent="-171450">
+              <a:buFontTx/>
+              <a:buChar char="-"/>
+            </a:pPr>
+            <a:r>
+              <a:rPr lang="en-GB" sz="1200" b="0" i="0" kern="1200" dirty="0">
+                <a:solidFill>
+                  <a:schemeClr val="tx1"/>
+                </a:solidFill>
+                <a:effectLst/>
+                <a:latin typeface="+mn-lt"/>
+                <a:ea typeface="+mn-ea"/>
+                <a:cs typeface="+mn-cs"/>
+              </a:rPr>
+              <a:t>Result: Yes. My left hand formed an 'A'—the system recognized it. Right hand 'V'—recognized. Both hands working independently and simultaneously. This is important because ISL uses both hands, often with different shapes.</a:t>
+            </a:r>
+          </a:p>
+          <a:p>
+            <a:pPr marL="171450" indent="-171450">
+              <a:buFontTx/>
+              <a:buChar char="-"/>
+            </a:pPr>
+            <a:endParaRPr lang="en-GB" sz="1200" b="0" i="0" kern="1200" dirty="0">
+              <a:solidFill>
+                <a:schemeClr val="tx1"/>
+              </a:solidFill>
+              <a:effectLst/>
+              <a:latin typeface="+mn-lt"/>
+              <a:ea typeface="+mn-ea"/>
+              <a:cs typeface="+mn-cs"/>
+            </a:endParaRPr>
+          </a:p>
+          <a:p>
+            <a:r>
+              <a:rPr lang="en-GB" sz="1200" b="0" i="0" kern="1200" dirty="0">
+                <a:solidFill>
+                  <a:schemeClr val="tx1"/>
+                </a:solidFill>
+                <a:effectLst/>
+                <a:latin typeface="+mn-lt"/>
+                <a:ea typeface="+mn-ea"/>
+                <a:cs typeface="+mn-cs"/>
+              </a:rPr>
+              <a:t>Criterion 2: </a:t>
+            </a:r>
+            <a:r>
+              <a:rPr lang="en-GB" sz="1200" b="0" i="1" kern="1200" dirty="0">
+                <a:solidFill>
+                  <a:schemeClr val="tx1"/>
+                </a:solidFill>
+                <a:effectLst/>
+                <a:latin typeface="+mn-lt"/>
+                <a:ea typeface="+mn-ea"/>
+                <a:cs typeface="+mn-cs"/>
+              </a:rPr>
+              <a:t>Does real-time feedback work correctly?</a:t>
+            </a:r>
+            <a:endParaRPr lang="en-GB" sz="1200" b="0" i="0" kern="1200" dirty="0">
+              <a:solidFill>
+                <a:schemeClr val="tx1"/>
+              </a:solidFill>
+              <a:effectLst/>
+              <a:latin typeface="+mn-lt"/>
+              <a:ea typeface="+mn-ea"/>
+              <a:cs typeface="+mn-cs"/>
+            </a:endParaRPr>
+          </a:p>
+          <a:p>
+            <a:pPr marL="171450" indent="-171450">
+              <a:buFontTx/>
+              <a:buChar char="-"/>
+            </a:pPr>
+            <a:r>
+              <a:rPr lang="en-GB" sz="1200" b="0" i="0" kern="1200" dirty="0">
+                <a:solidFill>
+                  <a:schemeClr val="tx1"/>
+                </a:solidFill>
+                <a:effectLst/>
+                <a:latin typeface="+mn-lt"/>
+                <a:ea typeface="+mn-ea"/>
+                <a:cs typeface="+mn-cs"/>
+              </a:rPr>
+              <a:t>Result: Yes. You saw the text update on screen. When I signed correctly, it showed the detected letter. When I was fumbling around, it showed... nothing, because the pose didn't match anything. That's correct </a:t>
+            </a:r>
+            <a:r>
+              <a:rPr lang="en-GB" sz="1200" b="0" i="0" kern="1200" dirty="0" err="1">
+                <a:solidFill>
+                  <a:schemeClr val="tx1"/>
+                </a:solidFill>
+                <a:effectLst/>
+                <a:latin typeface="+mn-lt"/>
+                <a:ea typeface="+mn-ea"/>
+                <a:cs typeface="+mn-cs"/>
+              </a:rPr>
+              <a:t>behavior</a:t>
+            </a:r>
+            <a:r>
+              <a:rPr lang="en-GB" sz="1200" b="0" i="0" kern="1200" dirty="0">
+                <a:solidFill>
+                  <a:schemeClr val="tx1"/>
+                </a:solidFill>
+                <a:effectLst/>
+                <a:latin typeface="+mn-lt"/>
+                <a:ea typeface="+mn-ea"/>
+                <a:cs typeface="+mn-cs"/>
+              </a:rPr>
+              <a:t>.</a:t>
+            </a:r>
+          </a:p>
+          <a:p>
+            <a:pPr marL="0" indent="0">
+              <a:buFontTx/>
+              <a:buNone/>
+            </a:pPr>
+            <a:endParaRPr lang="en-GB" sz="1200" b="0" i="0" kern="1200" dirty="0">
+              <a:solidFill>
+                <a:schemeClr val="tx1"/>
+              </a:solidFill>
+              <a:effectLst/>
+              <a:latin typeface="+mn-lt"/>
+              <a:ea typeface="+mn-ea"/>
+              <a:cs typeface="+mn-cs"/>
+            </a:endParaRPr>
+          </a:p>
+          <a:p>
+            <a:r>
+              <a:rPr lang="en-GB" sz="1200" b="0" i="0" kern="1200" dirty="0">
+                <a:solidFill>
+                  <a:schemeClr val="tx1"/>
+                </a:solidFill>
+                <a:effectLst/>
+                <a:latin typeface="+mn-lt"/>
+                <a:ea typeface="+mn-ea"/>
+                <a:cs typeface="+mn-cs"/>
+              </a:rPr>
+              <a:t>Criterion 3: </a:t>
+            </a:r>
+            <a:r>
+              <a:rPr lang="en-GB" sz="1200" b="0" i="1" kern="1200" dirty="0">
+                <a:solidFill>
+                  <a:schemeClr val="tx1"/>
+                </a:solidFill>
+                <a:effectLst/>
+                <a:latin typeface="+mn-lt"/>
+                <a:ea typeface="+mn-ea"/>
+                <a:cs typeface="+mn-cs"/>
+              </a:rPr>
+              <a:t>Can a user complete a short practice session without the app crashing or confusing them?</a:t>
+            </a:r>
+            <a:endParaRPr lang="en-GB" sz="1200" b="0" i="0" kern="1200" dirty="0">
+              <a:solidFill>
+                <a:schemeClr val="tx1"/>
+              </a:solidFill>
+              <a:effectLst/>
+              <a:latin typeface="+mn-lt"/>
+              <a:ea typeface="+mn-ea"/>
+              <a:cs typeface="+mn-cs"/>
+            </a:endParaRPr>
+          </a:p>
+          <a:p>
+            <a:pPr marL="171450" indent="-171450">
+              <a:buFontTx/>
+              <a:buChar char="-"/>
+            </a:pPr>
+            <a:r>
+              <a:rPr lang="en-GB" sz="1200" b="0" i="0" kern="1200" dirty="0">
+                <a:solidFill>
+                  <a:schemeClr val="tx1"/>
+                </a:solidFill>
+                <a:effectLst/>
+                <a:latin typeface="+mn-lt"/>
+                <a:ea typeface="+mn-ea"/>
+                <a:cs typeface="+mn-cs"/>
+              </a:rPr>
+              <a:t>Result: Yes. I signed through all three letters smoothly. No crashes. The interface was clear—what I needed to do was obvious.</a:t>
+            </a:r>
+          </a:p>
+          <a:p>
+            <a:pPr marL="0" indent="0">
+              <a:buFontTx/>
+              <a:buNone/>
+            </a:pPr>
+            <a:endParaRPr lang="en-GB" sz="1200" b="0" i="0" kern="1200" dirty="0">
+              <a:solidFill>
+                <a:schemeClr val="tx1"/>
+              </a:solidFill>
+              <a:effectLst/>
+              <a:latin typeface="+mn-lt"/>
+              <a:ea typeface="+mn-ea"/>
+              <a:cs typeface="+mn-cs"/>
+            </a:endParaRPr>
+          </a:p>
+          <a:p>
+            <a:endParaRPr lang="en-IE" dirty="0"/>
+          </a:p>
+        </p:txBody>
+      </p:sp>
+      <p:sp>
+        <p:nvSpPr>
+          <p:cNvPr id="4" name="Slide Number Placeholder 3"/>
+          <p:cNvSpPr>
+            <a:spLocks noGrp="1"/>
+          </p:cNvSpPr>
+          <p:nvPr>
+            <p:ph type="sldNum" sz="quarter" idx="10"/>
+          </p:nvPr>
+        </p:nvSpPr>
+        <p:spPr/>
+        <p:txBody>
+          <a:bodyPr/>
+          <a:lstStyle/>
+          <a:p>
+            <a:fld id="{39155FEB-D5E4-4A1E-87F4-37E283567B6E}" type="slidenum">
+              <a:rPr lang="en-IE" smtClean="0"/>
+              <a:pPr/>
+              <a:t>12</a:t>
+            </a:fld>
+            <a:endParaRPr lang="en-IE"/>
+          </a:p>
+        </p:txBody>
+      </p:sp>
+    </p:spTree>
+    <p:extLst>
+      <p:ext uri="{BB962C8B-B14F-4D97-AF65-F5344CB8AC3E}">
+        <p14:creationId xmlns:p14="http://schemas.microsoft.com/office/powerpoint/2010/main" val="3488367017"/>
+      </p:ext>
+    </p:extLst>
+  </p:cSld>
+  <p:clrMapOvr>
+    <a:masterClrMapping/>
+  </p:clrMapOvr>
+</p:notes>
+</file>
+
+<file path=ppt/notesSlides/notesSlide13.xml><?xml version="1.0" encoding="utf-8"?>
+<p:notes xmlns:a="http://schemas.openxmlformats.org/drawingml/2006/main" xmlns:r="http://schemas.openxmlformats.org/officeDocument/2006/relationships" xmlns:p="http://schemas.openxmlformats.org/presentationml/2006/main">
+  <p:cSld>
+    <p:spTree>
+      <p:nvGrpSpPr>
+        <p:cNvPr id="1" name=""/>
+        <p:cNvGrpSpPr/>
+        <p:nvPr/>
+      </p:nvGrpSpPr>
+      <p:grpSpPr>
+        <a:xfrm>
+          <a:off x="0" y="0"/>
+          <a:ext cx="0" cy="0"/>
+          <a:chOff x="0" y="0"/>
+          <a:chExt cx="0" cy="0"/>
+        </a:xfrm>
+      </p:grpSpPr>
+      <p:sp>
+        <p:nvSpPr>
+          <p:cNvPr id="2" name="Slide Image Placeholder 1"/>
+          <p:cNvSpPr>
+            <a:spLocks noGrp="1" noRot="1" noChangeAspect="1"/>
+          </p:cNvSpPr>
+          <p:nvPr>
+            <p:ph type="sldImg"/>
+          </p:nvPr>
+        </p:nvSpPr>
+        <p:spPr/>
+        <p:txBody>
+          <a:bodyPr/>
+          <a:lstStyle/>
+          <a:p>
+            <a:endParaRPr lang="en-IE"/>
+          </a:p>
+        </p:txBody>
+      </p:sp>
+      <p:sp>
+        <p:nvSpPr>
+          <p:cNvPr id="3" name="Notes Placeholder 2"/>
+          <p:cNvSpPr>
+            <a:spLocks noGrp="1"/>
+          </p:cNvSpPr>
+          <p:nvPr>
+            <p:ph type="body" idx="1"/>
+          </p:nvPr>
+        </p:nvSpPr>
+        <p:spPr/>
+        <p:txBody>
+          <a:bodyPr>
+            <a:normAutofit/>
+          </a:bodyPr>
+          <a:lstStyle/>
+          <a:p>
             <a:endParaRPr lang="en-IE" dirty="0"/>
           </a:p>
         </p:txBody>
@@ -1063,7 +1571,7 @@
 </p:notes>
 </file>
 
-<file path=ppt/notesSlides/notesSlide13.xml><?xml version="1.0" encoding="utf-8"?>
+<file path=ppt/notesSlides/notesSlide14.xml><?xml version="1.0" encoding="utf-8"?>
 <p:notes xmlns:a="http://schemas.openxmlformats.org/drawingml/2006/main" xmlns:r="http://schemas.openxmlformats.org/officeDocument/2006/relationships" xmlns:p="http://schemas.openxmlformats.org/presentationml/2006/main">
   <p:cSld>
     <p:spTree>
@@ -1210,7 +1718,96 @@
           </a:bodyPr>
           <a:lstStyle/>
           <a:p>
-            <a:endParaRPr lang="en-IE"/>
+            <a:r>
+              <a:rPr lang="en-GB" sz="1200" b="0" i="0" kern="1200" dirty="0">
+                <a:solidFill>
+                  <a:schemeClr val="tx1"/>
+                </a:solidFill>
+                <a:effectLst/>
+                <a:latin typeface="+mn-lt"/>
+                <a:ea typeface="+mn-ea"/>
+                <a:cs typeface="+mn-cs"/>
+              </a:rPr>
+              <a:t>So, what is Sign &amp; Spell VR? At its core, it's a virtual reality application that uses hand tracking to teach people Irish Sign Language. You put on a Meta Quest 3 headset, and instead of holding controllers, the system tracks your actual hands—your fingers, your palm position, everything.</a:t>
+            </a:r>
+          </a:p>
+          <a:p>
+            <a:endParaRPr lang="en-GB" sz="1200" b="0" i="0" kern="1200" dirty="0">
+              <a:solidFill>
+                <a:schemeClr val="tx1"/>
+              </a:solidFill>
+              <a:effectLst/>
+              <a:latin typeface="+mn-lt"/>
+              <a:ea typeface="+mn-ea"/>
+              <a:cs typeface="+mn-cs"/>
+            </a:endParaRPr>
+          </a:p>
+          <a:p>
+            <a:r>
+              <a:rPr lang="en-GB" sz="1200" b="0" i="0" kern="1200" dirty="0">
+                <a:solidFill>
+                  <a:schemeClr val="tx1"/>
+                </a:solidFill>
+                <a:effectLst/>
+                <a:latin typeface="+mn-lt"/>
+                <a:ea typeface="+mn-ea"/>
+                <a:cs typeface="+mn-cs"/>
+              </a:rPr>
+              <a:t>The app teaches you the ISL alphabet. You practice signing letters from A-Z and the system gives you immediate feedback—it tells you if you got it right or wrong, right there in the moment. No waiting. No guessing.</a:t>
+            </a:r>
+          </a:p>
+          <a:p>
+            <a:endParaRPr lang="en-GB" sz="1200" b="0" i="0" kern="1200" dirty="0">
+              <a:solidFill>
+                <a:schemeClr val="tx1"/>
+              </a:solidFill>
+              <a:effectLst/>
+              <a:latin typeface="+mn-lt"/>
+              <a:ea typeface="+mn-ea"/>
+              <a:cs typeface="+mn-cs"/>
+            </a:endParaRPr>
+          </a:p>
+          <a:p>
+            <a:r>
+              <a:rPr lang="en-GB" sz="1200" b="0" i="0" kern="1200" dirty="0">
+                <a:solidFill>
+                  <a:schemeClr val="tx1"/>
+                </a:solidFill>
+                <a:effectLst/>
+                <a:latin typeface="+mn-lt"/>
+                <a:ea typeface="+mn-ea"/>
+                <a:cs typeface="+mn-cs"/>
+              </a:rPr>
+              <a:t>As I develop it further, the plan is to expand from just letters to common words that the Deaf community actually uses, and eventually to simple sentences.</a:t>
+            </a:r>
+          </a:p>
+          <a:p>
+            <a:endParaRPr lang="en-GB" sz="1200" b="0" i="0" kern="1200" dirty="0">
+              <a:solidFill>
+                <a:schemeClr val="tx1"/>
+              </a:solidFill>
+              <a:effectLst/>
+              <a:latin typeface="+mn-lt"/>
+              <a:ea typeface="+mn-ea"/>
+              <a:cs typeface="+mn-cs"/>
+            </a:endParaRPr>
+          </a:p>
+          <a:p>
+            <a:r>
+              <a:rPr lang="en-GB" sz="1200" b="0" i="0" kern="1200" dirty="0">
+                <a:solidFill>
+                  <a:schemeClr val="tx1"/>
+                </a:solidFill>
+                <a:effectLst/>
+                <a:latin typeface="+mn-lt"/>
+                <a:ea typeface="+mn-ea"/>
+                <a:cs typeface="+mn-cs"/>
+              </a:rPr>
+              <a:t>All your progress gets saved locally on the headset—it's your personalized learning environment. Each time you log in, the system remembers what you've practiced and where you left off. That's the vision. That's what I'm building.</a:t>
+            </a:r>
+          </a:p>
+          <a:p>
+            <a:endParaRPr lang="en-IE" dirty="0"/>
           </a:p>
         </p:txBody>
       </p:sp>
@@ -1304,7 +1901,176 @@
           </a:bodyPr>
           <a:lstStyle/>
           <a:p>
-            <a:endParaRPr lang="en-IE"/>
+            <a:r>
+              <a:rPr lang="en-GB" sz="1200" b="0" i="0" kern="1200" dirty="0">
+                <a:solidFill>
+                  <a:schemeClr val="tx1"/>
+                </a:solidFill>
+                <a:effectLst/>
+                <a:latin typeface="+mn-lt"/>
+                <a:ea typeface="+mn-ea"/>
+                <a:cs typeface="+mn-cs"/>
+              </a:rPr>
+              <a:t>Let me give you some context. I have a deaf friend, and me myself, I don’t know the sign language. So now creating this app, I can learn on the way and not make him feel excluded with my friend group.</a:t>
+            </a:r>
+          </a:p>
+          <a:p>
+            <a:endParaRPr lang="en-GB" sz="1200" b="0" i="0" kern="1200" dirty="0">
+              <a:solidFill>
+                <a:schemeClr val="tx1"/>
+              </a:solidFill>
+              <a:effectLst/>
+              <a:latin typeface="+mn-lt"/>
+              <a:ea typeface="+mn-ea"/>
+              <a:cs typeface="+mn-cs"/>
+            </a:endParaRPr>
+          </a:p>
+          <a:p>
+            <a:r>
+              <a:rPr lang="en-IE" dirty="0"/>
+              <a:t>So I thought, I can create an app that lets users learn and practice the Irish Sign Language and test themselves.</a:t>
+            </a:r>
+          </a:p>
+          <a:p>
+            <a:endParaRPr lang="en-IE" dirty="0"/>
+          </a:p>
+          <a:p>
+            <a:r>
+              <a:rPr lang="en-GB" sz="1200" b="0" i="0" kern="1200" dirty="0">
+                <a:solidFill>
+                  <a:schemeClr val="tx1"/>
+                </a:solidFill>
+                <a:effectLst/>
+                <a:latin typeface="+mn-lt"/>
+                <a:ea typeface="+mn-ea"/>
+                <a:cs typeface="+mn-cs"/>
+              </a:rPr>
+              <a:t>Now, you might say, 'Karl, there are already sign language learning apps out there.' And yeah, there are. ASL </a:t>
+            </a:r>
+            <a:r>
+              <a:rPr lang="en-GB" sz="1200" b="0" i="0" kern="1200" dirty="0" err="1">
+                <a:solidFill>
+                  <a:schemeClr val="tx1"/>
+                </a:solidFill>
+                <a:effectLst/>
+                <a:latin typeface="+mn-lt"/>
+                <a:ea typeface="+mn-ea"/>
+                <a:cs typeface="+mn-cs"/>
+              </a:rPr>
+              <a:t>FingerSpeller</a:t>
+            </a:r>
+            <a:r>
+              <a:rPr lang="en-GB" sz="1200" b="0" i="0" kern="1200" dirty="0">
+                <a:solidFill>
+                  <a:schemeClr val="tx1"/>
+                </a:solidFill>
+                <a:effectLst/>
+                <a:latin typeface="+mn-lt"/>
+                <a:ea typeface="+mn-ea"/>
+                <a:cs typeface="+mn-cs"/>
+              </a:rPr>
+              <a:t> is great—it's a VR app where you practice American Sign Language fingerspelling. Silent Classroom VR puts you in a virtual classroom to learn ASL with hand tracking. Both are cool.</a:t>
+            </a:r>
+          </a:p>
+          <a:p>
+            <a:endParaRPr lang="en-GB" sz="1200" b="0" i="0" kern="1200" dirty="0">
+              <a:solidFill>
+                <a:schemeClr val="tx1"/>
+              </a:solidFill>
+              <a:effectLst/>
+              <a:latin typeface="+mn-lt"/>
+              <a:ea typeface="+mn-ea"/>
+              <a:cs typeface="+mn-cs"/>
+            </a:endParaRPr>
+          </a:p>
+          <a:p>
+            <a:r>
+              <a:rPr lang="en-GB" sz="1200" b="0" i="0" kern="1200" dirty="0">
+                <a:solidFill>
+                  <a:schemeClr val="tx1"/>
+                </a:solidFill>
+                <a:effectLst/>
+                <a:latin typeface="+mn-lt"/>
+                <a:ea typeface="+mn-ea"/>
+                <a:cs typeface="+mn-cs"/>
+              </a:rPr>
+              <a:t>But here's the problem: Most existing apps focus on American Sign Language (ASL). ASL uses one hand, has different grammar, completely different from Irish Sign Language. And ISL is underrepresented in digital learning platforms. It deserves its own dedicated tool.</a:t>
+            </a:r>
+          </a:p>
+          <a:p>
+            <a:endParaRPr lang="en-GB" sz="1200" b="0" i="0" kern="1200" dirty="0">
+              <a:solidFill>
+                <a:schemeClr val="tx1"/>
+              </a:solidFill>
+              <a:effectLst/>
+              <a:latin typeface="+mn-lt"/>
+              <a:ea typeface="+mn-ea"/>
+              <a:cs typeface="+mn-cs"/>
+            </a:endParaRPr>
+          </a:p>
+          <a:p>
+            <a:r>
+              <a:rPr lang="en-GB" sz="1200" b="0" i="0" kern="1200" dirty="0">
+                <a:solidFill>
+                  <a:schemeClr val="tx1"/>
+                </a:solidFill>
+                <a:effectLst/>
+                <a:latin typeface="+mn-lt"/>
+                <a:ea typeface="+mn-ea"/>
+                <a:cs typeface="+mn-cs"/>
+              </a:rPr>
+              <a:t>That's why I'm building this specifically for ISL. Not adapting an ASL app—building from scratch for Irish Sign Language with two-handed signing and ISL-specific grammar.</a:t>
+            </a:r>
+          </a:p>
+          <a:p>
+            <a:endParaRPr lang="en-GB" sz="1200" b="0" i="0" kern="1200" dirty="0">
+              <a:solidFill>
+                <a:schemeClr val="tx1"/>
+              </a:solidFill>
+              <a:effectLst/>
+              <a:latin typeface="+mn-lt"/>
+              <a:ea typeface="+mn-ea"/>
+              <a:cs typeface="+mn-cs"/>
+            </a:endParaRPr>
+          </a:p>
+          <a:p>
+            <a:r>
+              <a:rPr lang="en-GB" sz="1200" b="0" i="0" kern="1200" dirty="0">
+                <a:solidFill>
+                  <a:schemeClr val="tx1"/>
+                </a:solidFill>
+                <a:effectLst/>
+                <a:latin typeface="+mn-lt"/>
+                <a:ea typeface="+mn-ea"/>
+                <a:cs typeface="+mn-cs"/>
+              </a:rPr>
+              <a:t>Additionally—and this is crucial—I'm taking an ethical approach. Sign language is culturally rich and linguistically complex. There's academic research that warns against treating it carelessly. I'm designing this with the Deaf community in mind, not replacing human interpreters with avatars, but creating a tool that respects the language and the culture.</a:t>
+            </a:r>
+          </a:p>
+          <a:p>
+            <a:endParaRPr lang="en-GB" sz="1200" b="0" i="0" kern="1200" dirty="0">
+              <a:solidFill>
+                <a:schemeClr val="tx1"/>
+              </a:solidFill>
+              <a:effectLst/>
+              <a:latin typeface="+mn-lt"/>
+              <a:ea typeface="+mn-ea"/>
+              <a:cs typeface="+mn-cs"/>
+            </a:endParaRPr>
+          </a:p>
+          <a:p>
+            <a:r>
+              <a:rPr lang="en-GB" sz="1200" b="0" i="0" kern="1200" dirty="0">
+                <a:solidFill>
+                  <a:schemeClr val="tx1"/>
+                </a:solidFill>
+                <a:effectLst/>
+                <a:latin typeface="+mn-lt"/>
+                <a:ea typeface="+mn-ea"/>
+                <a:cs typeface="+mn-cs"/>
+              </a:rPr>
+              <a:t>A learner signs an 'A', gets instant feedback saying 'Correct!', feels a sense of progress, and is motivated to sign the next letter—that immediate feedback loop is backed by pedagogy research showing real-time feedback dramatically improves learning outcomes.</a:t>
+            </a:r>
           </a:p>
         </p:txBody>
       </p:sp>
@@ -1398,7 +2164,119 @@
           </a:bodyPr>
           <a:lstStyle/>
           <a:p>
-            <a:endParaRPr lang="en-IE"/>
+            <a:r>
+              <a:rPr lang="en-GB" sz="1200" b="0" i="0" kern="1200" dirty="0">
+                <a:solidFill>
+                  <a:schemeClr val="tx1"/>
+                </a:solidFill>
+                <a:effectLst/>
+                <a:latin typeface="+mn-lt"/>
+                <a:ea typeface="+mn-ea"/>
+                <a:cs typeface="+mn-cs"/>
+              </a:rPr>
+              <a:t>Let's talk about how I'm building this. I'm using an Incremental Model. I’m thinking this like building layers.</a:t>
+            </a:r>
+          </a:p>
+          <a:p>
+            <a:endParaRPr lang="en-GB" sz="1200" b="0" i="0" kern="1200" dirty="0">
+              <a:solidFill>
+                <a:schemeClr val="tx1"/>
+              </a:solidFill>
+              <a:effectLst/>
+              <a:latin typeface="+mn-lt"/>
+              <a:ea typeface="+mn-ea"/>
+              <a:cs typeface="+mn-cs"/>
+            </a:endParaRPr>
+          </a:p>
+          <a:p>
+            <a:r>
+              <a:rPr lang="en-GB" sz="1200" b="0" i="0" kern="1200" dirty="0">
+                <a:solidFill>
+                  <a:schemeClr val="tx1"/>
+                </a:solidFill>
+                <a:effectLst/>
+                <a:latin typeface="+mn-lt"/>
+                <a:ea typeface="+mn-ea"/>
+                <a:cs typeface="+mn-cs"/>
+              </a:rPr>
+              <a:t>Increment 1 (where I am now) focuses on the foundation: real-time hand tracking, recognizing all the ISL letters, and giving immediate feedback. Can the system track my hands? Can it recognize when I sign an 'A'? Does it tell me if I got it right? That's Increment 1.</a:t>
+            </a:r>
+          </a:p>
+          <a:p>
+            <a:endParaRPr lang="en-GB" sz="1200" b="0" i="0" kern="1200" dirty="0">
+              <a:solidFill>
+                <a:schemeClr val="tx1"/>
+              </a:solidFill>
+              <a:effectLst/>
+              <a:latin typeface="+mn-lt"/>
+              <a:ea typeface="+mn-ea"/>
+              <a:cs typeface="+mn-cs"/>
+            </a:endParaRPr>
+          </a:p>
+          <a:p>
+            <a:r>
+              <a:rPr lang="en-GB" sz="1200" b="0" i="0" kern="1200" dirty="0">
+                <a:solidFill>
+                  <a:schemeClr val="tx1"/>
+                </a:solidFill>
+                <a:effectLst/>
+                <a:latin typeface="+mn-lt"/>
+                <a:ea typeface="+mn-ea"/>
+                <a:cs typeface="+mn-cs"/>
+              </a:rPr>
+              <a:t>Increment 2 about expanding capability: I add common ISL words, move toward sentence construction, and improve the overall UI so it doesn't look like a prototype anymore.</a:t>
+            </a:r>
+          </a:p>
+          <a:p>
+            <a:endParaRPr lang="en-GB" sz="1200" b="0" i="0" kern="1200" dirty="0">
+              <a:solidFill>
+                <a:schemeClr val="tx1"/>
+              </a:solidFill>
+              <a:effectLst/>
+              <a:latin typeface="+mn-lt"/>
+              <a:ea typeface="+mn-ea"/>
+              <a:cs typeface="+mn-cs"/>
+            </a:endParaRPr>
+          </a:p>
+          <a:p>
+            <a:r>
+              <a:rPr lang="en-GB" sz="1200" b="0" i="0" kern="1200" dirty="0">
+                <a:solidFill>
+                  <a:schemeClr val="tx1"/>
+                </a:solidFill>
+                <a:effectLst/>
+                <a:latin typeface="+mn-lt"/>
+                <a:ea typeface="+mn-ea"/>
+                <a:cs typeface="+mn-cs"/>
+              </a:rPr>
+              <a:t>Increment 3 is about persistence and assessment: proper data saving, a testing module where users can assess their progress, and thorough user testing with real learners.</a:t>
+            </a:r>
+          </a:p>
+          <a:p>
+            <a:endParaRPr lang="en-GB" sz="1200" b="0" i="0" kern="1200" dirty="0">
+              <a:solidFill>
+                <a:schemeClr val="tx1"/>
+              </a:solidFill>
+              <a:effectLst/>
+              <a:latin typeface="+mn-lt"/>
+              <a:ea typeface="+mn-ea"/>
+              <a:cs typeface="+mn-cs"/>
+            </a:endParaRPr>
+          </a:p>
+          <a:p>
+            <a:r>
+              <a:rPr lang="en-GB" sz="1200" b="0" i="0" kern="1200" dirty="0">
+                <a:solidFill>
+                  <a:schemeClr val="tx1"/>
+                </a:solidFill>
+                <a:effectLst/>
+                <a:latin typeface="+mn-lt"/>
+                <a:ea typeface="+mn-ea"/>
+                <a:cs typeface="+mn-cs"/>
+              </a:rPr>
+              <a:t>Why this approach? Because I can release working features early, get feedback from stakeholders, and adapt. Instead of showing up with a broken half-finished app, I'm showing you something that actually works—it's just not feature-complete</a:t>
+            </a:r>
+            <a:endParaRPr lang="en-IE" dirty="0"/>
           </a:p>
         </p:txBody>
       </p:sp>
@@ -1510,7 +2388,192 @@
           </a:bodyPr>
           <a:lstStyle/>
           <a:p>
-            <a:endParaRPr lang="en-IE"/>
+            <a:r>
+              <a:rPr lang="en-GB" sz="1200" b="0" i="0" kern="1200" dirty="0">
+                <a:solidFill>
+                  <a:schemeClr val="tx1"/>
+                </a:solidFill>
+                <a:effectLst/>
+                <a:latin typeface="+mn-lt"/>
+                <a:ea typeface="+mn-ea"/>
+                <a:cs typeface="+mn-cs"/>
+              </a:rPr>
+              <a:t>Alright, tech stack time. Let me break down the tools I chose:</a:t>
+            </a:r>
+          </a:p>
+          <a:p>
+            <a:endParaRPr lang="en-GB" sz="1200" b="0" i="0" kern="1200" dirty="0">
+              <a:solidFill>
+                <a:schemeClr val="tx1"/>
+              </a:solidFill>
+              <a:effectLst/>
+              <a:latin typeface="+mn-lt"/>
+              <a:ea typeface="+mn-ea"/>
+              <a:cs typeface="+mn-cs"/>
+            </a:endParaRPr>
+          </a:p>
+          <a:p>
+            <a:r>
+              <a:rPr lang="en-GB" sz="1200" b="0" i="0" kern="1200" dirty="0">
+                <a:solidFill>
+                  <a:schemeClr val="tx1"/>
+                </a:solidFill>
+                <a:effectLst/>
+                <a:latin typeface="+mn-lt"/>
+                <a:ea typeface="+mn-ea"/>
+                <a:cs typeface="+mn-cs"/>
+              </a:rPr>
+              <a:t>Meta Quest 3/3S — The VR headset. Why this one? It's standalone—meaning it doesn't need a powerful PC tethered to it. It has excellent hand tracking built-in. And it's increasingly used in education, so it's a practical choice for accessibility.</a:t>
+            </a:r>
+          </a:p>
+          <a:p>
+            <a:endParaRPr lang="en-GB" sz="1200" b="0" i="0" kern="1200" dirty="0">
+              <a:solidFill>
+                <a:schemeClr val="tx1"/>
+              </a:solidFill>
+              <a:effectLst/>
+              <a:latin typeface="+mn-lt"/>
+              <a:ea typeface="+mn-ea"/>
+              <a:cs typeface="+mn-cs"/>
+            </a:endParaRPr>
+          </a:p>
+          <a:p>
+            <a:r>
+              <a:rPr lang="en-GB" sz="1200" b="0" i="0" kern="1200" dirty="0">
+                <a:solidFill>
+                  <a:schemeClr val="tx1"/>
+                </a:solidFill>
+                <a:effectLst/>
+                <a:latin typeface="+mn-lt"/>
+                <a:ea typeface="+mn-ea"/>
+                <a:cs typeface="+mn-cs"/>
+              </a:rPr>
+              <a:t>Godot 4 — The game engine. I chose Godot because it's free, open-source, and I'm literally learning it right now in my XR Prototyping module. It's got native support for VR, and the documentation for hand tracking is solid. Could I have used Unity? Sure. But Godot felt less overwhelming and more suited to this educational project.</a:t>
+            </a:r>
+          </a:p>
+          <a:p>
+            <a:endParaRPr lang="en-GB" sz="1200" b="0" i="0" kern="1200" dirty="0">
+              <a:solidFill>
+                <a:schemeClr val="tx1"/>
+              </a:solidFill>
+              <a:effectLst/>
+              <a:latin typeface="+mn-lt"/>
+              <a:ea typeface="+mn-ea"/>
+              <a:cs typeface="+mn-cs"/>
+            </a:endParaRPr>
+          </a:p>
+          <a:p>
+            <a:r>
+              <a:rPr lang="en-GB" sz="1200" b="0" i="0" kern="1200" dirty="0" err="1">
+                <a:solidFill>
+                  <a:schemeClr val="tx1"/>
+                </a:solidFill>
+                <a:effectLst/>
+                <a:latin typeface="+mn-lt"/>
+                <a:ea typeface="+mn-ea"/>
+                <a:cs typeface="+mn-cs"/>
+              </a:rPr>
+              <a:t>GDScript</a:t>
+            </a:r>
+            <a:r>
+              <a:rPr lang="en-GB" sz="1200" b="0" i="0" kern="1200" dirty="0">
+                <a:solidFill>
+                  <a:schemeClr val="tx1"/>
+                </a:solidFill>
+                <a:effectLst/>
+                <a:latin typeface="+mn-lt"/>
+                <a:ea typeface="+mn-ea"/>
+                <a:cs typeface="+mn-cs"/>
+              </a:rPr>
+              <a:t> — Godot's built-in programming language. It looks like Python, which I already know a bit of. Makes iteration fast, makes debugging easier, and it's tightly integrated with the engine</a:t>
+            </a:r>
+          </a:p>
+          <a:p>
+            <a:endParaRPr lang="en-GB" sz="1200" b="0" i="0" kern="1200" dirty="0">
+              <a:solidFill>
+                <a:schemeClr val="tx1"/>
+              </a:solidFill>
+              <a:effectLst/>
+              <a:latin typeface="+mn-lt"/>
+              <a:ea typeface="+mn-ea"/>
+              <a:cs typeface="+mn-cs"/>
+            </a:endParaRPr>
+          </a:p>
+          <a:p>
+            <a:r>
+              <a:rPr lang="en-GB" sz="1200" b="0" i="0" kern="1200" dirty="0" err="1">
+                <a:solidFill>
+                  <a:schemeClr val="tx1"/>
+                </a:solidFill>
+                <a:effectLst/>
+                <a:latin typeface="+mn-lt"/>
+                <a:ea typeface="+mn-ea"/>
+                <a:cs typeface="+mn-cs"/>
+              </a:rPr>
+              <a:t>OpenXR</a:t>
+            </a:r>
+            <a:r>
+              <a:rPr lang="en-GB" sz="1200" b="0" i="0" kern="1200" dirty="0">
+                <a:solidFill>
+                  <a:schemeClr val="tx1"/>
+                </a:solidFill>
+                <a:effectLst/>
+                <a:latin typeface="+mn-lt"/>
+                <a:ea typeface="+mn-ea"/>
+                <a:cs typeface="+mn-cs"/>
+              </a:rPr>
+              <a:t> — This is the bridge between Godot and the Meta Quest. </a:t>
+            </a:r>
+            <a:r>
+              <a:rPr lang="en-GB" sz="1200" b="0" i="0" kern="1200" dirty="0" err="1">
+                <a:solidFill>
+                  <a:schemeClr val="tx1"/>
+                </a:solidFill>
+                <a:effectLst/>
+                <a:latin typeface="+mn-lt"/>
+                <a:ea typeface="+mn-ea"/>
+                <a:cs typeface="+mn-cs"/>
+              </a:rPr>
+              <a:t>OpenXR</a:t>
+            </a:r>
+            <a:r>
+              <a:rPr lang="en-GB" sz="1200" b="0" i="0" kern="1200" dirty="0">
+                <a:solidFill>
+                  <a:schemeClr val="tx1"/>
+                </a:solidFill>
+                <a:effectLst/>
+                <a:latin typeface="+mn-lt"/>
+                <a:ea typeface="+mn-ea"/>
+                <a:cs typeface="+mn-cs"/>
+              </a:rPr>
+              <a:t> is an open standard that lets different VR hardware and software talk to each other. It's what gives me access to hand tracking data in real-time.</a:t>
+            </a:r>
+          </a:p>
+          <a:p>
+            <a:endParaRPr lang="en-GB" sz="1200" b="0" i="0" kern="1200" dirty="0">
+              <a:solidFill>
+                <a:schemeClr val="tx1"/>
+              </a:solidFill>
+              <a:effectLst/>
+              <a:latin typeface="+mn-lt"/>
+              <a:ea typeface="+mn-ea"/>
+              <a:cs typeface="+mn-cs"/>
+            </a:endParaRPr>
+          </a:p>
+          <a:p>
+            <a:r>
+              <a:rPr lang="en-GB" sz="1200" b="0" i="0" kern="1200" dirty="0">
+                <a:solidFill>
+                  <a:schemeClr val="tx1"/>
+                </a:solidFill>
+                <a:effectLst/>
+                <a:latin typeface="+mn-lt"/>
+                <a:ea typeface="+mn-ea"/>
+                <a:cs typeface="+mn-cs"/>
+              </a:rPr>
+              <a:t>JSON (local storage) — For saving user data. Not a cloud database, not PostgreSQL—just JSON files stored locally on the Quest. Simple, effective, and scalable if I need it later.</a:t>
+            </a:r>
+            <a:endParaRPr lang="en-IE" dirty="0"/>
           </a:p>
         </p:txBody>
       </p:sp>
@@ -1558,6 +2621,375 @@
 </file>
 
 <file path=ppt/notesSlides/notesSlide6.xml><?xml version="1.0" encoding="utf-8"?>
+<p:notes xmlns:a="http://schemas.openxmlformats.org/drawingml/2006/main" xmlns:r="http://schemas.openxmlformats.org/officeDocument/2006/relationships" xmlns:p="http://schemas.openxmlformats.org/presentationml/2006/main">
+  <p:cSld>
+    <p:spTree>
+      <p:nvGrpSpPr>
+        <p:cNvPr id="1" name=""/>
+        <p:cNvGrpSpPr/>
+        <p:nvPr/>
+      </p:nvGrpSpPr>
+      <p:grpSpPr>
+        <a:xfrm>
+          <a:off x="0" y="0"/>
+          <a:ext cx="0" cy="0"/>
+          <a:chOff x="0" y="0"/>
+          <a:chExt cx="0" cy="0"/>
+        </a:xfrm>
+      </p:grpSpPr>
+      <p:sp>
+        <p:nvSpPr>
+          <p:cNvPr id="2" name="Slide Image Placeholder 1"/>
+          <p:cNvSpPr>
+            <a:spLocks noGrp="1" noRot="1" noChangeAspect="1"/>
+          </p:cNvSpPr>
+          <p:nvPr>
+            <p:ph type="sldImg"/>
+          </p:nvPr>
+        </p:nvSpPr>
+        <p:spPr/>
+      </p:sp>
+      <p:sp>
+        <p:nvSpPr>
+          <p:cNvPr id="3" name="Notes Placeholder 2"/>
+          <p:cNvSpPr>
+            <a:spLocks noGrp="1"/>
+          </p:cNvSpPr>
+          <p:nvPr>
+            <p:ph type="body" idx="1"/>
+          </p:nvPr>
+        </p:nvSpPr>
+        <p:spPr/>
+        <p:txBody>
+          <a:bodyPr/>
+          <a:lstStyle/>
+          <a:p>
+            <a:r>
+              <a:rPr lang="en-GB" sz="1200" b="0" i="0" kern="1200" dirty="0">
+                <a:solidFill>
+                  <a:schemeClr val="tx1"/>
+                </a:solidFill>
+                <a:effectLst/>
+                <a:latin typeface="+mn-lt"/>
+                <a:ea typeface="+mn-ea"/>
+                <a:cs typeface="+mn-cs"/>
+              </a:rPr>
+              <a:t>Before I built anything, I had to ask: </a:t>
+            </a:r>
+            <a:r>
+              <a:rPr lang="en-GB" sz="1200" b="0" i="1" kern="1200" dirty="0">
+                <a:solidFill>
+                  <a:schemeClr val="tx1"/>
+                </a:solidFill>
+                <a:effectLst/>
+                <a:latin typeface="+mn-lt"/>
+                <a:ea typeface="+mn-ea"/>
+                <a:cs typeface="+mn-cs"/>
+              </a:rPr>
+              <a:t>Who is this for? </a:t>
+            </a:r>
+            <a:r>
+              <a:rPr lang="en-GB" sz="1200" b="0" i="0" kern="1200" dirty="0">
+                <a:solidFill>
+                  <a:schemeClr val="tx1"/>
+                </a:solidFill>
+                <a:effectLst/>
+                <a:latin typeface="+mn-lt"/>
+                <a:ea typeface="+mn-ea"/>
+                <a:cs typeface="+mn-cs"/>
+              </a:rPr>
+              <a:t>What do they actually need?</a:t>
+            </a:r>
+          </a:p>
+          <a:p>
+            <a:endParaRPr lang="en-GB" sz="1200" b="0" i="0" kern="1200" dirty="0">
+              <a:solidFill>
+                <a:schemeClr val="tx1"/>
+              </a:solidFill>
+              <a:effectLst/>
+              <a:latin typeface="+mn-lt"/>
+              <a:ea typeface="+mn-ea"/>
+              <a:cs typeface="+mn-cs"/>
+            </a:endParaRPr>
+          </a:p>
+          <a:p>
+            <a:r>
+              <a:rPr lang="en-GB" sz="1200" b="0" i="0" kern="1200" dirty="0">
+                <a:solidFill>
+                  <a:schemeClr val="tx1"/>
+                </a:solidFill>
+                <a:effectLst/>
+                <a:latin typeface="+mn-lt"/>
+                <a:ea typeface="+mn-ea"/>
+                <a:cs typeface="+mn-cs"/>
+              </a:rPr>
+              <a:t>Stakeholders — That's learners (people wanting to learn ISL), the Deaf community (to make sure I'm not oversimplifying or misrepresenting their language), and teachers (who might use this in a classroom).</a:t>
+            </a:r>
+          </a:p>
+          <a:p>
+            <a:endParaRPr lang="en-GB" sz="1200" b="0" i="0" kern="1200" dirty="0">
+              <a:solidFill>
+                <a:schemeClr val="tx1"/>
+              </a:solidFill>
+              <a:effectLst/>
+              <a:latin typeface="+mn-lt"/>
+              <a:ea typeface="+mn-ea"/>
+              <a:cs typeface="+mn-cs"/>
+            </a:endParaRPr>
+          </a:p>
+          <a:p>
+            <a:r>
+              <a:rPr lang="en-GB" sz="1200" b="0" i="0" kern="1200" dirty="0">
+                <a:solidFill>
+                  <a:schemeClr val="tx1"/>
+                </a:solidFill>
+                <a:effectLst/>
+                <a:latin typeface="+mn-lt"/>
+                <a:ea typeface="+mn-ea"/>
+                <a:cs typeface="+mn-cs"/>
+              </a:rPr>
+              <a:t>Functional requirements — These are the features that have to work:</a:t>
+            </a:r>
+          </a:p>
+          <a:p>
+            <a:pPr marL="171450" indent="-171450">
+              <a:buFontTx/>
+              <a:buChar char="-"/>
+            </a:pPr>
+            <a:r>
+              <a:rPr lang="en-GB" sz="1200" b="0" i="0" kern="1200" dirty="0">
+                <a:solidFill>
+                  <a:schemeClr val="tx1"/>
+                </a:solidFill>
+                <a:effectLst/>
+                <a:latin typeface="+mn-lt"/>
+                <a:ea typeface="+mn-ea"/>
+                <a:cs typeface="+mn-cs"/>
+              </a:rPr>
+              <a:t>Hand Tracking: The system must capture real-time hand position and finger orientation.</a:t>
+            </a:r>
+          </a:p>
+          <a:p>
+            <a:pPr marL="171450" indent="-171450">
+              <a:buFontTx/>
+              <a:buChar char="-"/>
+            </a:pPr>
+            <a:r>
+              <a:rPr lang="en-GB" sz="1200" b="0" i="0" kern="1200" dirty="0">
+                <a:solidFill>
+                  <a:schemeClr val="tx1"/>
+                </a:solidFill>
+                <a:effectLst/>
+                <a:latin typeface="+mn-lt"/>
+                <a:ea typeface="+mn-ea"/>
+                <a:cs typeface="+mn-cs"/>
+              </a:rPr>
+              <a:t>Sign Recognition: Compare user hand poses against a locally stored JSON library of correct ISL signs, designed so it can later sync with a cloud database</a:t>
+            </a:r>
+          </a:p>
+          <a:p>
+            <a:pPr marL="171450" indent="-171450">
+              <a:buFontTx/>
+              <a:buChar char="-"/>
+            </a:pPr>
+            <a:r>
+              <a:rPr lang="en-GB" sz="1200" b="0" i="0" kern="1200" dirty="0">
+                <a:solidFill>
+                  <a:schemeClr val="tx1"/>
+                </a:solidFill>
+                <a:effectLst/>
+                <a:latin typeface="+mn-lt"/>
+                <a:ea typeface="+mn-ea"/>
+                <a:cs typeface="+mn-cs"/>
+              </a:rPr>
+              <a:t> Feedback: Tell the user immediately if they got the sign right or wrong.</a:t>
+            </a:r>
+          </a:p>
+          <a:p>
+            <a:r>
+              <a:rPr lang="en-GB" sz="1200" b="0" i="0" kern="1200" dirty="0">
+                <a:solidFill>
+                  <a:schemeClr val="tx1"/>
+                </a:solidFill>
+                <a:effectLst/>
+                <a:latin typeface="+mn-lt"/>
+                <a:ea typeface="+mn-ea"/>
+                <a:cs typeface="+mn-cs"/>
+              </a:rPr>
+              <a:t>- Progress Storage: Remember what they've learned.</a:t>
+            </a:r>
+          </a:p>
+          <a:p>
+            <a:endParaRPr lang="en-IE" i="0" dirty="0"/>
+          </a:p>
+          <a:p>
+            <a:r>
+              <a:rPr lang="en-GB" sz="1200" b="0" i="0" kern="1200" dirty="0">
+                <a:solidFill>
+                  <a:schemeClr val="tx1"/>
+                </a:solidFill>
+                <a:effectLst/>
+                <a:latin typeface="+mn-lt"/>
+                <a:ea typeface="+mn-ea"/>
+                <a:cs typeface="+mn-cs"/>
+              </a:rPr>
+              <a:t>Non-Functional requirements — These are the qualities:</a:t>
+            </a:r>
+          </a:p>
+          <a:p>
+            <a:pPr marL="171450" indent="-171450">
+              <a:buFontTx/>
+              <a:buChar char="-"/>
+            </a:pPr>
+            <a:r>
+              <a:rPr lang="en-GB" sz="1200" b="0" i="0" kern="1200" dirty="0">
+                <a:solidFill>
+                  <a:schemeClr val="tx1"/>
+                </a:solidFill>
+                <a:effectLst/>
+                <a:latin typeface="+mn-lt"/>
+                <a:ea typeface="+mn-ea"/>
+                <a:cs typeface="+mn-cs"/>
+              </a:rPr>
+              <a:t>Low Latency: Hand tracking feedback must be instant. If there's a 500ms delay between me signing and the system responding, it breaks immersion and kills the learning experience.</a:t>
+            </a:r>
+          </a:p>
+          <a:p>
+            <a:pPr marL="171450" indent="-171450">
+              <a:buFontTx/>
+              <a:buChar char="-"/>
+            </a:pPr>
+            <a:r>
+              <a:rPr lang="en-GB" sz="1200" b="0" i="0" kern="1200" dirty="0">
+                <a:solidFill>
+                  <a:schemeClr val="tx1"/>
+                </a:solidFill>
+                <a:effectLst/>
+                <a:latin typeface="+mn-lt"/>
+                <a:ea typeface="+mn-ea"/>
+                <a:cs typeface="+mn-cs"/>
+              </a:rPr>
+              <a:t>Accessible UI: Clear, simple interface. Not cluttered. Easy to navigate even if you've never used VR before.</a:t>
+            </a:r>
+          </a:p>
+          <a:p>
+            <a:pPr marL="171450" indent="-171450">
+              <a:buFontTx/>
+              <a:buChar char="-"/>
+            </a:pPr>
+            <a:r>
+              <a:rPr lang="en-GB" sz="1200" b="0" i="0" kern="1200" dirty="0">
+                <a:solidFill>
+                  <a:schemeClr val="tx1"/>
+                </a:solidFill>
+                <a:effectLst/>
+                <a:latin typeface="+mn-lt"/>
+                <a:ea typeface="+mn-ea"/>
+                <a:cs typeface="+mn-cs"/>
+              </a:rPr>
+              <a:t>Intuitive Design: Users should figure it out without needing a manual.</a:t>
+            </a:r>
+          </a:p>
+          <a:p>
+            <a:pPr marL="171450" indent="-171450">
+              <a:buFontTx/>
+              <a:buChar char="-"/>
+            </a:pPr>
+            <a:endParaRPr lang="en-GB" sz="1200" b="0" i="0" kern="1200" dirty="0">
+              <a:solidFill>
+                <a:schemeClr val="tx1"/>
+              </a:solidFill>
+              <a:effectLst/>
+              <a:latin typeface="+mn-lt"/>
+              <a:ea typeface="+mn-ea"/>
+              <a:cs typeface="+mn-cs"/>
+            </a:endParaRPr>
+          </a:p>
+          <a:p>
+            <a:pPr marL="0" indent="0">
+              <a:buFontTx/>
+              <a:buNone/>
+            </a:pPr>
+            <a:r>
+              <a:rPr lang="en-GB" sz="1200" b="0" i="0" kern="1200" dirty="0">
+                <a:solidFill>
+                  <a:schemeClr val="tx1"/>
+                </a:solidFill>
+                <a:effectLst/>
+                <a:latin typeface="+mn-lt"/>
+                <a:ea typeface="+mn-ea"/>
+                <a:cs typeface="+mn-cs"/>
+              </a:rPr>
+              <a:t>I mapped out the main user interactions in a use case diagram. Basically, it shows: the learner creates an account, logs in, then the app guides them through hand calibration, practice sessions, testing, and progress tracking. Every action—whether it's practicing alphabet, practicing words, or taking a test—requires the same core system processes: track hand movements and recognize hand poses. So those two are the backbone. The feedback and saving data happen automatically after each action. It's not complex, but it shows how everything connects. The learner is at the </a:t>
+            </a:r>
+            <a:r>
+              <a:rPr lang="en-GB" sz="1200" b="0" i="0" kern="1200" dirty="0" err="1">
+                <a:solidFill>
+                  <a:schemeClr val="tx1"/>
+                </a:solidFill>
+                <a:effectLst/>
+                <a:latin typeface="+mn-lt"/>
+                <a:ea typeface="+mn-ea"/>
+                <a:cs typeface="+mn-cs"/>
+              </a:rPr>
+              <a:t>center</a:t>
+            </a:r>
+            <a:r>
+              <a:rPr lang="en-GB" sz="1200" b="0" i="0" kern="1200" dirty="0">
+                <a:solidFill>
+                  <a:schemeClr val="tx1"/>
+                </a:solidFill>
+                <a:effectLst/>
+                <a:latin typeface="+mn-lt"/>
+                <a:ea typeface="+mn-ea"/>
+                <a:cs typeface="+mn-cs"/>
+              </a:rPr>
+              <a:t>, and everything radiates from what they're trying to do.</a:t>
+            </a:r>
+          </a:p>
+          <a:p>
+            <a:endParaRPr lang="en-IE" i="0" dirty="0"/>
+          </a:p>
+        </p:txBody>
+      </p:sp>
+      <p:sp>
+        <p:nvSpPr>
+          <p:cNvPr id="4" name="Slide Number Placeholder 3"/>
+          <p:cNvSpPr>
+            <a:spLocks noGrp="1"/>
+          </p:cNvSpPr>
+          <p:nvPr>
+            <p:ph type="sldNum" sz="quarter" idx="5"/>
+          </p:nvPr>
+        </p:nvSpPr>
+        <p:spPr/>
+        <p:txBody>
+          <a:bodyPr/>
+          <a:lstStyle/>
+          <a:p>
+            <a:fld id="{39155FEB-D5E4-4A1E-87F4-37E283567B6E}" type="slidenum">
+              <a:rPr lang="en-IE" smtClean="0"/>
+              <a:pPr/>
+              <a:t>6</a:t>
+            </a:fld>
+            <a:endParaRPr lang="en-IE"/>
+          </a:p>
+        </p:txBody>
+      </p:sp>
+    </p:spTree>
+    <p:extLst>
+      <p:ext uri="{BB962C8B-B14F-4D97-AF65-F5344CB8AC3E}">
+        <p14:creationId xmlns:p14="http://schemas.microsoft.com/office/powerpoint/2010/main" val="3675851525"/>
+      </p:ext>
+    </p:extLst>
+  </p:cSld>
+  <p:clrMapOvr>
+    <a:masterClrMapping/>
+  </p:clrMapOvr>
+</p:notes>
+</file>
+
+<file path=ppt/notesSlides/notesSlide7.xml><?xml version="1.0" encoding="utf-8"?>
 <p:notes xmlns:a="http://schemas.openxmlformats.org/drawingml/2006/main" xmlns:r="http://schemas.openxmlformats.org/officeDocument/2006/relationships" xmlns:p="http://schemas.openxmlformats.org/presentationml/2006/main">
   <p:cSld>
     <p:spTree>
@@ -1628,7 +3060,153 @@
           </a:bodyPr>
           <a:lstStyle/>
           <a:p>
-            <a:endParaRPr lang="en-IE"/>
+            <a:r>
+              <a:rPr lang="en-GB" sz="1200" b="0" i="0" kern="1200" dirty="0">
+                <a:solidFill>
+                  <a:schemeClr val="tx1"/>
+                </a:solidFill>
+                <a:effectLst/>
+                <a:latin typeface="+mn-lt"/>
+                <a:ea typeface="+mn-ea"/>
+                <a:cs typeface="+mn-cs"/>
+              </a:rPr>
+              <a:t>Let's zoom out and look at the big picture architecture</a:t>
+            </a:r>
+          </a:p>
+          <a:p>
+            <a:endParaRPr lang="en-GB" sz="1200" b="0" i="0" kern="1200" dirty="0">
+              <a:solidFill>
+                <a:schemeClr val="tx1"/>
+              </a:solidFill>
+              <a:effectLst/>
+              <a:latin typeface="+mn-lt"/>
+              <a:ea typeface="+mn-ea"/>
+              <a:cs typeface="+mn-cs"/>
+            </a:endParaRPr>
+          </a:p>
+          <a:p>
+            <a:pPr marL="228600" indent="-228600">
+              <a:buAutoNum type="arabicPeriod"/>
+            </a:pPr>
+            <a:r>
+              <a:rPr lang="en-GB" sz="1200" b="0" i="0" kern="1200" dirty="0">
+                <a:solidFill>
+                  <a:schemeClr val="tx1"/>
+                </a:solidFill>
+                <a:effectLst/>
+                <a:latin typeface="+mn-lt"/>
+                <a:ea typeface="+mn-ea"/>
+                <a:cs typeface="+mn-cs"/>
+              </a:rPr>
+              <a:t>Hand Tracking — </a:t>
+            </a:r>
+            <a:r>
+              <a:rPr lang="en-GB" sz="1200" b="0" i="0" kern="1200" dirty="0" err="1">
+                <a:solidFill>
+                  <a:schemeClr val="tx1"/>
+                </a:solidFill>
+                <a:effectLst/>
+                <a:latin typeface="+mn-lt"/>
+                <a:ea typeface="+mn-ea"/>
+                <a:cs typeface="+mn-cs"/>
+              </a:rPr>
+              <a:t>OpenXR</a:t>
+            </a:r>
+            <a:r>
+              <a:rPr lang="en-GB" sz="1200" b="0" i="0" kern="1200" dirty="0">
+                <a:solidFill>
+                  <a:schemeClr val="tx1"/>
+                </a:solidFill>
+                <a:effectLst/>
+                <a:latin typeface="+mn-lt"/>
+                <a:ea typeface="+mn-ea"/>
+                <a:cs typeface="+mn-cs"/>
+              </a:rPr>
+              <a:t> sensors on the Quest track your hands in real-time. It's getting positional data constantly—where each finger is, what angle your hand is at, all of it.</a:t>
+            </a:r>
+          </a:p>
+          <a:p>
+            <a:pPr marL="228600" indent="-228600">
+              <a:buAutoNum type="arabicPeriod"/>
+            </a:pPr>
+            <a:r>
+              <a:rPr lang="en-GB" sz="1200" b="0" i="0" kern="1200" dirty="0">
+                <a:solidFill>
+                  <a:schemeClr val="tx1"/>
+                </a:solidFill>
+                <a:effectLst/>
+                <a:latin typeface="+mn-lt"/>
+                <a:ea typeface="+mn-ea"/>
+                <a:cs typeface="+mn-cs"/>
+              </a:rPr>
+              <a:t>Recognition — That hand pose data gets fed into my sign recognition system. I compare your hand position and shape to a stored JSON file of users calibration of ISL signs. </a:t>
+            </a:r>
+          </a:p>
+          <a:p>
+            <a:pPr marL="228600" indent="-228600">
+              <a:buAutoNum type="arabicPeriod"/>
+            </a:pPr>
+            <a:r>
+              <a:rPr lang="en-GB" sz="1200" b="0" i="0" kern="1200" dirty="0">
+                <a:solidFill>
+                  <a:schemeClr val="tx1"/>
+                </a:solidFill>
+                <a:effectLst/>
+                <a:latin typeface="+mn-lt"/>
+                <a:ea typeface="+mn-ea"/>
+                <a:cs typeface="+mn-cs"/>
+              </a:rPr>
+              <a:t>Feedback — If your pose matches a sign (within a confidence threshold), the system generates visual feedback. You see text on screen: "That's right! Well done." If it doesn't match, you get "Try again—remember the hand should be lower.“</a:t>
+            </a:r>
+          </a:p>
+          <a:p>
+            <a:pPr marL="228600" indent="-228600">
+              <a:buAutoNum type="arabicPeriod"/>
+            </a:pPr>
+            <a:r>
+              <a:rPr lang="en-GB" sz="1200" b="0" i="0" kern="1200" dirty="0">
+                <a:solidFill>
+                  <a:schemeClr val="tx1"/>
+                </a:solidFill>
+                <a:effectLst/>
+                <a:latin typeface="+mn-lt"/>
+                <a:ea typeface="+mn-ea"/>
+                <a:cs typeface="+mn-cs"/>
+              </a:rPr>
+              <a:t> Storage — Your progress and calibration data get saved to JSON files on the device, so next time you use the app, it remembers you.</a:t>
+            </a:r>
+          </a:p>
+          <a:p>
+            <a:pPr marL="228600" indent="-228600">
+              <a:buAutoNum type="arabicPeriod"/>
+            </a:pPr>
+            <a:endParaRPr lang="en-GB" sz="1200" b="0" i="0" kern="1200" dirty="0">
+              <a:solidFill>
+                <a:schemeClr val="tx1"/>
+              </a:solidFill>
+              <a:effectLst/>
+              <a:latin typeface="+mn-lt"/>
+              <a:ea typeface="+mn-ea"/>
+              <a:cs typeface="+mn-cs"/>
+            </a:endParaRPr>
+          </a:p>
+          <a:p>
+            <a:pPr marL="0" indent="0">
+              <a:buNone/>
+            </a:pPr>
+            <a:r>
+              <a:rPr lang="en-GB" sz="1200" b="0" i="0" kern="1200" dirty="0">
+                <a:solidFill>
+                  <a:schemeClr val="tx1"/>
+                </a:solidFill>
+                <a:effectLst/>
+                <a:latin typeface="+mn-lt"/>
+                <a:ea typeface="+mn-ea"/>
+                <a:cs typeface="+mn-cs"/>
+              </a:rPr>
+              <a:t>This is all happening standalone on the Quest. No cloud calls (for now), no external servers. Everything runs locally. That means the experience is smooth, responsive, and doesn't depend on internet connectivity.</a:t>
+            </a:r>
+            <a:endParaRPr lang="en-IE" dirty="0"/>
           </a:p>
         </p:txBody>
       </p:sp>
@@ -1666,100 +3244,6 @@
     <p:extLst>
       <p:ext uri="{BB962C8B-B14F-4D97-AF65-F5344CB8AC3E}">
         <p14:creationId xmlns:p14="http://schemas.microsoft.com/office/powerpoint/2010/main" val="1867825183"/>
-      </p:ext>
-    </p:extLst>
-  </p:cSld>
-  <p:clrMapOvr>
-    <a:masterClrMapping/>
-  </p:clrMapOvr>
-</p:notes>
-</file>
-
-<file path=ppt/notesSlides/notesSlide7.xml><?xml version="1.0" encoding="utf-8"?>
-<p:notes xmlns:a="http://schemas.openxmlformats.org/drawingml/2006/main" xmlns:r="http://schemas.openxmlformats.org/officeDocument/2006/relationships" xmlns:p="http://schemas.openxmlformats.org/presentationml/2006/main">
-  <p:cSld>
-    <p:spTree>
-      <p:nvGrpSpPr>
-        <p:cNvPr id="1" name=""/>
-        <p:cNvGrpSpPr/>
-        <p:nvPr/>
-      </p:nvGrpSpPr>
-      <p:grpSpPr>
-        <a:xfrm>
-          <a:off x="0" y="0"/>
-          <a:ext cx="0" cy="0"/>
-          <a:chOff x="0" y="0"/>
-          <a:chExt cx="0" cy="0"/>
-        </a:xfrm>
-      </p:grpSpPr>
-      <p:sp>
-        <p:nvSpPr>
-          <p:cNvPr id="2" name="Slide Image Placeholder 1"/>
-          <p:cNvSpPr>
-            <a:spLocks noGrp="1" noRot="1" noChangeAspect="1"/>
-          </p:cNvSpPr>
-          <p:nvPr>
-            <p:ph type="sldImg"/>
-          </p:nvPr>
-        </p:nvSpPr>
-        <p:spPr/>
-        <p:txBody>
-          <a:bodyPr/>
-          <a:lstStyle/>
-          <a:p>
-            <a:endParaRPr lang="en-IE"/>
-          </a:p>
-        </p:txBody>
-      </p:sp>
-      <p:sp>
-        <p:nvSpPr>
-          <p:cNvPr id="3" name="Notes Placeholder 2"/>
-          <p:cNvSpPr>
-            <a:spLocks noGrp="1"/>
-          </p:cNvSpPr>
-          <p:nvPr>
-            <p:ph type="body" idx="1"/>
-          </p:nvPr>
-        </p:nvSpPr>
-        <p:spPr/>
-        <p:txBody>
-          <a:bodyPr>
-            <a:normAutofit/>
-          </a:bodyPr>
-          <a:lstStyle/>
-          <a:p>
-            <a:endParaRPr lang="en-IE"/>
-          </a:p>
-        </p:txBody>
-      </p:sp>
-      <p:sp>
-        <p:nvSpPr>
-          <p:cNvPr id="4" name="Slide Number Placeholder 3"/>
-          <p:cNvSpPr>
-            <a:spLocks noGrp="1"/>
-          </p:cNvSpPr>
-          <p:nvPr>
-            <p:ph type="sldNum" sz="quarter" idx="10"/>
-          </p:nvPr>
-        </p:nvSpPr>
-        <p:spPr/>
-        <p:txBody>
-          <a:bodyPr/>
-          <a:lstStyle/>
-          <a:p>
-            <a:fld id="{39155FEB-D5E4-4A1E-87F4-37E283567B6E}" type="slidenum">
-              <a:rPr lang="en-IE" smtClean="0"/>
-              <a:pPr/>
-              <a:t>8</a:t>
-            </a:fld>
-            <a:endParaRPr lang="en-IE"/>
-          </a:p>
-        </p:txBody>
-      </p:sp>
-    </p:spTree>
-    <p:extLst>
-      <p:ext uri="{BB962C8B-B14F-4D97-AF65-F5344CB8AC3E}">
-        <p14:creationId xmlns:p14="http://schemas.microsoft.com/office/powerpoint/2010/main" val="4003121453"/>
       </p:ext>
     </p:extLst>
   </p:cSld>
@@ -1822,7 +3306,144 @@
           </a:bodyPr>
           <a:lstStyle/>
           <a:p>
-            <a:endParaRPr lang="en-IE"/>
+            <a:r>
+              <a:rPr lang="en-GB" sz="1200" b="0" i="0" kern="1200" dirty="0">
+                <a:solidFill>
+                  <a:schemeClr val="tx1"/>
+                </a:solidFill>
+                <a:effectLst/>
+                <a:latin typeface="+mn-lt"/>
+                <a:ea typeface="+mn-ea"/>
+                <a:cs typeface="+mn-cs"/>
+              </a:rPr>
+              <a:t>So, what does the user actually see as of now?</a:t>
+            </a:r>
+          </a:p>
+          <a:p>
+            <a:endParaRPr lang="en-GB" sz="1200" b="0" i="0" kern="1200" dirty="0">
+              <a:solidFill>
+                <a:schemeClr val="tx1"/>
+              </a:solidFill>
+              <a:effectLst/>
+              <a:latin typeface="+mn-lt"/>
+              <a:ea typeface="+mn-ea"/>
+              <a:cs typeface="+mn-cs"/>
+            </a:endParaRPr>
+          </a:p>
+          <a:p>
+            <a:r>
+              <a:rPr lang="en-GB" sz="1200" b="0" i="0" kern="1200" dirty="0">
+                <a:solidFill>
+                  <a:schemeClr val="tx1"/>
+                </a:solidFill>
+                <a:effectLst/>
+                <a:latin typeface="+mn-lt"/>
+                <a:ea typeface="+mn-ea"/>
+                <a:cs typeface="+mn-cs"/>
+              </a:rPr>
+              <a:t>You put on the headset, and you are presented in your room. Not distracting. Minimal design. Off to the side, there's a floating reference board showing the ISL alphabet—a quick visual guide so you remember what the letter 'M' looks like, what 'P' looks like.</a:t>
+            </a:r>
+          </a:p>
+          <a:p>
+            <a:endParaRPr lang="en-GB" sz="1200" b="0" i="0" kern="1200" dirty="0">
+              <a:solidFill>
+                <a:schemeClr val="tx1"/>
+              </a:solidFill>
+              <a:effectLst/>
+              <a:latin typeface="+mn-lt"/>
+              <a:ea typeface="+mn-ea"/>
+              <a:cs typeface="+mn-cs"/>
+            </a:endParaRPr>
+          </a:p>
+          <a:p>
+            <a:r>
+              <a:rPr lang="en-GB" sz="1200" b="0" i="0" kern="1200" dirty="0">
+                <a:solidFill>
+                  <a:schemeClr val="tx1"/>
+                </a:solidFill>
+                <a:effectLst/>
+                <a:latin typeface="+mn-lt"/>
+                <a:ea typeface="+mn-ea"/>
+                <a:cs typeface="+mn-cs"/>
+              </a:rPr>
+              <a:t>Passthrough camera: The Quest has a passthrough feature where you can see your real environment through the headset's cameras while also seeing virtual objects overlaid. So you see your actual hands in your actual room, but they're also being tracked and displayed in VR. It's less isolating than full VR, which is good for learning.</a:t>
+            </a:r>
+          </a:p>
+          <a:p>
+            <a:endParaRPr lang="en-GB" sz="1200" b="0" i="0" kern="1200" dirty="0">
+              <a:solidFill>
+                <a:schemeClr val="tx1"/>
+              </a:solidFill>
+              <a:effectLst/>
+              <a:latin typeface="+mn-lt"/>
+              <a:ea typeface="+mn-ea"/>
+              <a:cs typeface="+mn-cs"/>
+            </a:endParaRPr>
+          </a:p>
+          <a:p>
+            <a:r>
+              <a:rPr lang="en-GB" sz="1200" b="0" i="0" kern="1200" dirty="0">
+                <a:solidFill>
+                  <a:schemeClr val="tx1"/>
+                </a:solidFill>
+                <a:effectLst/>
+                <a:latin typeface="+mn-lt"/>
+                <a:ea typeface="+mn-ea"/>
+                <a:cs typeface="+mn-cs"/>
+              </a:rPr>
+              <a:t>Live virtual hands: Your actual hands appear as virtual representations. You move your real hand, and you see it mirrored in the VR. Very intuitive—no controllers to learn.</a:t>
+            </a:r>
+          </a:p>
+          <a:p>
+            <a:endParaRPr lang="en-GB" sz="1200" b="0" i="0" kern="1200" dirty="0">
+              <a:solidFill>
+                <a:schemeClr val="tx1"/>
+              </a:solidFill>
+              <a:effectLst/>
+              <a:latin typeface="+mn-lt"/>
+              <a:ea typeface="+mn-ea"/>
+              <a:cs typeface="+mn-cs"/>
+            </a:endParaRPr>
+          </a:p>
+          <a:p>
+            <a:r>
+              <a:rPr lang="en-GB" sz="1200" b="0" i="0" kern="1200" dirty="0">
+                <a:solidFill>
+                  <a:schemeClr val="tx1"/>
+                </a:solidFill>
+                <a:effectLst/>
+                <a:latin typeface="+mn-lt"/>
+                <a:ea typeface="+mn-ea"/>
+                <a:cs typeface="+mn-cs"/>
+              </a:rPr>
+              <a:t>Real-time feedback text: On screen, you see text updating: "Left hand = A, Right hand = V". As you change your hand shape, the text changes. Immediate feedback. You know the system is responding to you.</a:t>
+            </a:r>
+          </a:p>
+          <a:p>
+            <a:endParaRPr lang="en-GB" sz="1200" b="0" i="0" kern="1200" dirty="0">
+              <a:solidFill>
+                <a:schemeClr val="tx1"/>
+              </a:solidFill>
+              <a:effectLst/>
+              <a:latin typeface="+mn-lt"/>
+              <a:ea typeface="+mn-ea"/>
+              <a:cs typeface="+mn-cs"/>
+            </a:endParaRPr>
+          </a:p>
+          <a:p>
+            <a:r>
+              <a:rPr lang="en-GB" sz="1200" b="0" i="0" kern="1200" dirty="0">
+                <a:solidFill>
+                  <a:schemeClr val="tx1"/>
+                </a:solidFill>
+                <a:effectLst/>
+                <a:latin typeface="+mn-lt"/>
+                <a:ea typeface="+mn-ea"/>
+                <a:cs typeface="+mn-cs"/>
+              </a:rPr>
+              <a:t>The whole design philosophy is: minimize cognitive load, maximize clarity. Don't make the learner think. Just let them practice and see if they're getting it right.</a:t>
+            </a:r>
+            <a:endParaRPr lang="en-IE" dirty="0"/>
           </a:p>
         </p:txBody>
       </p:sp>
@@ -1844,7 +3465,7 @@
             <a:fld id="{39155FEB-D5E4-4A1E-87F4-37E283567B6E}" type="slidenum">
               <a:rPr lang="en-IE" smtClean="0"/>
               <a:pPr/>
-              <a:t>9</a:t>
+              <a:t>8</a:t>
             </a:fld>
             <a:endParaRPr lang="en-IE"/>
           </a:p>
@@ -1853,7 +3474,7 @@
     </p:spTree>
     <p:extLst>
       <p:ext uri="{BB962C8B-B14F-4D97-AF65-F5344CB8AC3E}">
-        <p14:creationId xmlns:p14="http://schemas.microsoft.com/office/powerpoint/2010/main" val="3435431980"/>
+        <p14:creationId xmlns:p14="http://schemas.microsoft.com/office/powerpoint/2010/main" val="4003121453"/>
       </p:ext>
     </p:extLst>
   </p:cSld>
@@ -1916,7 +3537,191 @@
           </a:bodyPr>
           <a:lstStyle/>
           <a:p>
-            <a:endParaRPr lang="en-IE"/>
+            <a:r>
+              <a:rPr lang="en-GB" sz="1200" b="0" i="0" kern="1200" dirty="0">
+                <a:solidFill>
+                  <a:schemeClr val="tx1"/>
+                </a:solidFill>
+                <a:effectLst/>
+                <a:latin typeface="+mn-lt"/>
+                <a:ea typeface="+mn-ea"/>
+                <a:cs typeface="+mn-cs"/>
+              </a:rPr>
+              <a:t>Now let's talk about the logic layer—the stuff happening in the middle that makes the app actually work.</a:t>
+            </a:r>
+          </a:p>
+          <a:p>
+            <a:endParaRPr lang="en-GB" sz="1200" b="0" i="0" kern="1200" dirty="0">
+              <a:solidFill>
+                <a:schemeClr val="tx1"/>
+              </a:solidFill>
+              <a:effectLst/>
+              <a:latin typeface="+mn-lt"/>
+              <a:ea typeface="+mn-ea"/>
+              <a:cs typeface="+mn-cs"/>
+            </a:endParaRPr>
+          </a:p>
+          <a:p>
+            <a:r>
+              <a:rPr lang="en-GB" sz="1200" b="0" i="0" kern="1200" dirty="0">
+                <a:solidFill>
+                  <a:schemeClr val="tx1"/>
+                </a:solidFill>
+                <a:effectLst/>
+                <a:latin typeface="+mn-lt"/>
+                <a:ea typeface="+mn-ea"/>
+                <a:cs typeface="+mn-cs"/>
+              </a:rPr>
+              <a:t>Hand Pose Detection: </a:t>
+            </a:r>
+            <a:r>
+              <a:rPr lang="en-GB" sz="1200" b="0" i="0" kern="1200" dirty="0" err="1">
+                <a:solidFill>
+                  <a:schemeClr val="tx1"/>
+                </a:solidFill>
+                <a:effectLst/>
+                <a:latin typeface="+mn-lt"/>
+                <a:ea typeface="+mn-ea"/>
+                <a:cs typeface="+mn-cs"/>
+              </a:rPr>
+              <a:t>OpenXR</a:t>
+            </a:r>
+            <a:r>
+              <a:rPr lang="en-GB" sz="1200" b="0" i="0" kern="1200" dirty="0">
+                <a:solidFill>
+                  <a:schemeClr val="tx1"/>
+                </a:solidFill>
+                <a:effectLst/>
+                <a:latin typeface="+mn-lt"/>
+                <a:ea typeface="+mn-ea"/>
+                <a:cs typeface="+mn-cs"/>
+              </a:rPr>
+              <a:t> is constantly giving me data about the user's hand. X, Y, Z coordinates for each finger joint, palm position, rotation. This is streaming in real-time from the Quest's hand tracking sensors.</a:t>
+            </a:r>
+          </a:p>
+          <a:p>
+            <a:endParaRPr lang="en-GB" sz="1200" b="0" i="0" kern="1200" dirty="0">
+              <a:solidFill>
+                <a:schemeClr val="tx1"/>
+              </a:solidFill>
+              <a:effectLst/>
+              <a:latin typeface="+mn-lt"/>
+              <a:ea typeface="+mn-ea"/>
+              <a:cs typeface="+mn-cs"/>
+            </a:endParaRPr>
+          </a:p>
+          <a:p>
+            <a:r>
+              <a:rPr lang="en-GB" sz="1200" b="0" i="0" kern="1200" dirty="0">
+                <a:solidFill>
+                  <a:schemeClr val="tx1"/>
+                </a:solidFill>
+                <a:effectLst/>
+                <a:latin typeface="+mn-lt"/>
+                <a:ea typeface="+mn-ea"/>
+                <a:cs typeface="+mn-cs"/>
+              </a:rPr>
+              <a:t>Gesture Matching: I take that hand pose data and compare it to a JSON library of users ISL signs after calibration. I'm using rule-based recognition. Basically, I'm saying: </a:t>
+            </a:r>
+            <a:r>
+              <a:rPr lang="en-GB" sz="1200" b="0" i="1" kern="1200" dirty="0">
+                <a:solidFill>
+                  <a:schemeClr val="tx1"/>
+                </a:solidFill>
+                <a:effectLst/>
+                <a:latin typeface="+mn-lt"/>
+                <a:ea typeface="+mn-ea"/>
+                <a:cs typeface="+mn-cs"/>
+              </a:rPr>
+              <a:t>'If the left hand is in a closed fist AND the fingers are pointing upward AND the wrist is at this angle, that's an A.'</a:t>
+            </a:r>
+            <a:r>
+              <a:rPr lang="en-GB" sz="1200" b="0" i="0" kern="1200" dirty="0">
+                <a:solidFill>
+                  <a:schemeClr val="tx1"/>
+                </a:solidFill>
+                <a:effectLst/>
+                <a:latin typeface="+mn-lt"/>
+                <a:ea typeface="+mn-ea"/>
+                <a:cs typeface="+mn-cs"/>
+              </a:rPr>
+              <a:t> Simple if-then logic.</a:t>
+            </a:r>
+          </a:p>
+          <a:p>
+            <a:endParaRPr lang="en-GB" sz="1200" b="0" i="0" kern="1200" dirty="0">
+              <a:solidFill>
+                <a:schemeClr val="tx1"/>
+              </a:solidFill>
+              <a:effectLst/>
+              <a:latin typeface="+mn-lt"/>
+              <a:ea typeface="+mn-ea"/>
+              <a:cs typeface="+mn-cs"/>
+            </a:endParaRPr>
+          </a:p>
+          <a:p>
+            <a:r>
+              <a:rPr lang="en-GB" sz="1200" b="0" i="0" kern="1200" dirty="0">
+                <a:solidFill>
+                  <a:schemeClr val="tx1"/>
+                </a:solidFill>
+                <a:effectLst/>
+                <a:latin typeface="+mn-lt"/>
+                <a:ea typeface="+mn-ea"/>
+                <a:cs typeface="+mn-cs"/>
+              </a:rPr>
+              <a:t>Confidence Validation: The system doesn't just say 'match found.' It checks: </a:t>
+            </a:r>
+            <a:r>
+              <a:rPr lang="en-GB" sz="1200" b="0" i="1" kern="1200" dirty="0">
+                <a:solidFill>
+                  <a:schemeClr val="tx1"/>
+                </a:solidFill>
+                <a:effectLst/>
+                <a:latin typeface="+mn-lt"/>
+                <a:ea typeface="+mn-ea"/>
+                <a:cs typeface="+mn-cs"/>
+              </a:rPr>
+              <a:t>Does the match quality meet my confidence threshold?</a:t>
+            </a:r>
+            <a:r>
+              <a:rPr lang="en-GB" sz="1200" b="0" i="0" kern="1200" dirty="0">
+                <a:solidFill>
+                  <a:schemeClr val="tx1"/>
+                </a:solidFill>
+                <a:effectLst/>
+                <a:latin typeface="+mn-lt"/>
+                <a:ea typeface="+mn-ea"/>
+                <a:cs typeface="+mn-cs"/>
+              </a:rPr>
+              <a:t> Maybe I require 85% similarity to accept a sign. If the match is only 70% similar, I say 'Try again.’</a:t>
+            </a:r>
+          </a:p>
+          <a:p>
+            <a:endParaRPr lang="en-GB" sz="1200" b="0" i="0" kern="1200" dirty="0">
+              <a:solidFill>
+                <a:schemeClr val="tx1"/>
+              </a:solidFill>
+              <a:effectLst/>
+              <a:latin typeface="+mn-lt"/>
+              <a:ea typeface="+mn-ea"/>
+              <a:cs typeface="+mn-cs"/>
+            </a:endParaRPr>
+          </a:p>
+          <a:p>
+            <a:r>
+              <a:rPr lang="en-GB" sz="1200" b="0" i="0" kern="1200" dirty="0">
+                <a:solidFill>
+                  <a:schemeClr val="tx1"/>
+                </a:solidFill>
+                <a:effectLst/>
+                <a:latin typeface="+mn-lt"/>
+                <a:ea typeface="+mn-ea"/>
+                <a:cs typeface="+mn-cs"/>
+              </a:rPr>
+              <a:t>Real-time Feedback: As soon as validation happens, visual feedback appears. No lag. User signs an 'A', system recognizes it, text appears on screen: 'Correct!' All within milliseconds.</a:t>
+            </a:r>
+            <a:endParaRPr lang="en-IE" dirty="0"/>
           </a:p>
         </p:txBody>
       </p:sp>
@@ -1938,7 +3743,7 @@
             <a:fld id="{39155FEB-D5E4-4A1E-87F4-37E283567B6E}" type="slidenum">
               <a:rPr lang="en-IE" smtClean="0"/>
               <a:pPr/>
-              <a:t>10</a:t>
+              <a:t>9</a:t>
             </a:fld>
             <a:endParaRPr lang="en-IE"/>
           </a:p>
@@ -1947,7 +3752,7 @@
     </p:spTree>
     <p:extLst>
       <p:ext uri="{BB962C8B-B14F-4D97-AF65-F5344CB8AC3E}">
-        <p14:creationId xmlns:p14="http://schemas.microsoft.com/office/powerpoint/2010/main" val="4146026319"/>
+        <p14:creationId xmlns:p14="http://schemas.microsoft.com/office/powerpoint/2010/main" val="3435431980"/>
       </p:ext>
     </p:extLst>
   </p:cSld>
@@ -2490,7 +4295,7 @@
           <a:p>
             <a:fld id="{AF0D53F2-6605-491B-A522-26FC2F4F9BCD}" type="datetime1">
               <a:rPr lang="en-US" smtClean="0"/>
-              <a:t>11/29/2025</a:t>
+              <a:t>12/2/2025</a:t>
             </a:fld>
             <a:endParaRPr lang="en-US"/>
           </a:p>
@@ -2680,7 +4485,7 @@
           <a:p>
             <a:fld id="{33DE2F5F-ADB1-4FC5-9086-0BE59847FEFA}" type="datetime1">
               <a:rPr lang="en-US" smtClean="0"/>
-              <a:t>11/29/2025</a:t>
+              <a:t>12/2/2025</a:t>
             </a:fld>
             <a:endParaRPr lang="en-US"/>
           </a:p>
@@ -2879,7 +4684,7 @@
           <a:p>
             <a:fld id="{710825EC-483B-45E9-8C22-E036CF677E1E}" type="datetime1">
               <a:rPr lang="en-US" smtClean="0"/>
-              <a:t>11/29/2025</a:t>
+              <a:t>12/2/2025</a:t>
             </a:fld>
             <a:endParaRPr lang="en-US"/>
           </a:p>
@@ -3073,7 +4878,7 @@
           <a:p>
             <a:fld id="{DB2CCA16-2DDB-40B9-9F54-A095905B077E}" type="datetime1">
               <a:rPr lang="en-US" smtClean="0"/>
-              <a:t>11/29/2025</a:t>
+              <a:t>12/2/2025</a:t>
             </a:fld>
             <a:endParaRPr lang="en-US"/>
           </a:p>
@@ -3284,7 +5089,7 @@
           <a:p>
             <a:fld id="{664DF457-5724-4B26-A4C4-59D64F3AB245}" type="datetime1">
               <a:rPr lang="en-US" smtClean="0"/>
-              <a:t>11/29/2025</a:t>
+              <a:t>12/2/2025</a:t>
             </a:fld>
             <a:endParaRPr lang="en-US"/>
           </a:p>
@@ -3535,7 +5340,7 @@
           <a:p>
             <a:fld id="{19BF1AC6-D369-4639-99E9-4FF457440EA0}" type="datetime1">
               <a:rPr lang="en-US" smtClean="0"/>
-              <a:t>11/29/2025</a:t>
+              <a:t>12/2/2025</a:t>
             </a:fld>
             <a:endParaRPr lang="en-US"/>
           </a:p>
@@ -3921,7 +5726,7 @@
           <a:p>
             <a:fld id="{ABCFB202-6EFB-4907-8D9D-680BD149527A}" type="datetime1">
               <a:rPr lang="en-US" smtClean="0"/>
-              <a:t>11/29/2025</a:t>
+              <a:t>12/2/2025</a:t>
             </a:fld>
             <a:endParaRPr lang="en-US"/>
           </a:p>
@@ -4058,7 +5863,7 @@
           <a:p>
             <a:fld id="{A762A42C-DE72-47AA-BBAF-B081607E035C}" type="datetime1">
               <a:rPr lang="en-US" smtClean="0"/>
-              <a:t>11/29/2025</a:t>
+              <a:t>12/2/2025</a:t>
             </a:fld>
             <a:endParaRPr lang="en-US"/>
           </a:p>
@@ -4172,7 +5977,7 @@
           <a:p>
             <a:fld id="{DB5CFB85-5351-4D3E-B4CE-B0F17214F29F}" type="datetime1">
               <a:rPr lang="en-US" smtClean="0"/>
-              <a:t>11/29/2025</a:t>
+              <a:t>12/2/2025</a:t>
             </a:fld>
             <a:endParaRPr lang="en-US"/>
           </a:p>
@@ -4468,7 +6273,7 @@
           <a:p>
             <a:fld id="{16A57C7F-E9A1-4E64-8A30-05C3992913B8}" type="datetime1">
               <a:rPr lang="en-US" smtClean="0"/>
-              <a:t>11/29/2025</a:t>
+              <a:t>12/2/2025</a:t>
             </a:fld>
             <a:endParaRPr lang="en-US"/>
           </a:p>
@@ -4745,7 +6550,7 @@
           <a:p>
             <a:fld id="{3D8E544F-E88E-4EB1-8D10-5091A0506034}" type="datetime1">
               <a:rPr lang="en-US" smtClean="0"/>
-              <a:t>11/29/2025</a:t>
+              <a:t>12/2/2025</a:t>
             </a:fld>
             <a:endParaRPr lang="en-US"/>
           </a:p>
@@ -5410,7 +7215,7 @@
           <a:p>
             <a:fld id="{B2BBC70F-B5CB-4B78-BD55-A2A1CC49D82A}" type="datetime1">
               <a:rPr lang="en-US" smtClean="0"/>
-              <a:t>11/29/2025</a:t>
+              <a:t>12/2/2025</a:t>
             </a:fld>
             <a:endParaRPr lang="en-US"/>
           </a:p>
@@ -7816,7 +9621,7 @@
           <p:nvPr/>
         </p:nvPicPr>
         <p:blipFill>
-          <a:blip r:embed="rId2" cstate="print">
+          <a:blip r:embed="rId3" cstate="print">
             <a:extLst>
               <a:ext uri="{28A0092B-C50C-407E-A947-70E740481C1C}">
                 <a14:useLocalDpi xmlns:a14="http://schemas.microsoft.com/office/drawing/2010/main" val="0"/>
